--- a/assets/pptx/catalog-496.pptx
+++ b/assets/pptx/catalog-496.pptx
@@ -3262,7 +3262,7 @@
                 <a:ea typeface="Ebrima"/>
                 <a:cs typeface="Ebrima"/>
               </a:rPr>
-              <a:t>ኣንተ በሁሉ ላይ ከፍ ከፍ ያልህ (ራስ ነህና) 2x</a:t>
+              <a:t>ኣንተ በሁሉ ላይ ከፍ ከፍ ያልህ ራስ ነህና 2x</a:t>
             </a:r>
           </a:p>
         </p:txBody>
@@ -3347,7 +3347,7 @@
                 <a:ea typeface="Ebrima"/>
                 <a:cs typeface="Ebrima"/>
               </a:rPr>
-              <a:t>በዘመናት መሃል (የለም ሚመስልህ)5X</a:t>
+              <a:t>በዘመናት መሃል የለም ሚመስልህ5X</a:t>
             </a:r>
           </a:p>
         </p:txBody>
@@ -3432,7 +3432,7 @@
                 <a:ea typeface="Ebrima"/>
                 <a:cs typeface="Ebrima"/>
               </a:rPr>
-              <a:t>(የተቀደሰ ነው)4x</a:t>
+              <a:t>የተቀደሰ ነው4x</a:t>
             </a:r>
           </a:p>
         </p:txBody>
@@ -3499,7 +3499,7 @@
                 <a:ea typeface="Ebrima"/>
                 <a:cs typeface="Ebrima"/>
               </a:rPr>
-              <a:t>ባንተ እደነቃለሁኝ (ዝምብዬ)3x</a:t>
+              <a:t>ባንተ እደነቃለሁኝ ዝምብዬ3x</a:t>
             </a:r>
           </a:p>
           <a:p>
@@ -3517,7 +3517,7 @@
                 <a:ea typeface="Ebrima"/>
                 <a:cs typeface="Ebrima"/>
               </a:rPr>
-              <a:t>ባንተ እገረማለሁኝ (ጌታዬ)3x</a:t>
+              <a:t>ባንተ እገረማለሁኝ ጌታዬ3x</a:t>
             </a:r>
           </a:p>
           <a:p>
